--- a/images/新建 Microsoft PowerPoint 演示文稿.pptx
+++ b/images/新建 Microsoft PowerPoint 演示文稿.pptx
@@ -104,6 +104,11 @@
       </a:defRPr>
     </a:lvl9pPr>
   </p:defaultTextStyle>
+  <p:extLst>
+    <p:ext uri="{EFAFB233-063F-42B5-8137-9DF3F51BA10A}">
+      <p15:sldGuideLst xmlns:p15="http://schemas.microsoft.com/office/powerpoint/2012/main"/>
+    </p:ext>
+  </p:extLst>
 </p:presentation>
 </file>
 
@@ -3323,10 +3328,10 @@
       </p:grpSpPr>
       <p:grpSp>
         <p:nvGrpSpPr>
-          <p:cNvPr id="8" name="组合 7">
-            <a:extLst>
-              <a:ext uri="{FF2B5EF4-FFF2-40B4-BE49-F238E27FC236}">
-                <a16:creationId xmlns:a16="http://schemas.microsoft.com/office/drawing/2014/main" id="{046DC016-F6BC-4774-A418-5C1CB29F42C8}"/>
+          <p:cNvPr id="4" name="组合 3">
+            <a:extLst>
+              <a:ext uri="{FF2B5EF4-FFF2-40B4-BE49-F238E27FC236}">
+                <a16:creationId xmlns:a16="http://schemas.microsoft.com/office/drawing/2014/main" id="{5FB7FAB9-4517-467E-9C72-9256172AB6D6}"/>
               </a:ext>
             </a:extLst>
           </p:cNvPr>
@@ -3335,18 +3340,18 @@
         </p:nvGrpSpPr>
         <p:grpSpPr>
           <a:xfrm>
-            <a:off x="268704" y="-1150374"/>
-            <a:ext cx="11581174" cy="9158747"/>
-            <a:chOff x="268704" y="-1150374"/>
-            <a:chExt cx="11581174" cy="9158747"/>
+            <a:off x="2429333" y="-150965"/>
+            <a:ext cx="7333333" cy="8333333"/>
+            <a:chOff x="2429333" y="-150965"/>
+            <a:chExt cx="7333333" cy="8333333"/>
           </a:xfrm>
         </p:grpSpPr>
         <p:pic>
           <p:nvPicPr>
-            <p:cNvPr id="5" name="图片 4">
+            <p:cNvPr id="2" name="图片 1">
               <a:extLst>
                 <a:ext uri="{FF2B5EF4-FFF2-40B4-BE49-F238E27FC236}">
-                  <a16:creationId xmlns:a16="http://schemas.microsoft.com/office/drawing/2014/main" id="{CEB53D16-9DBD-40D3-9719-28916D7AFD08}"/>
+                  <a16:creationId xmlns:a16="http://schemas.microsoft.com/office/drawing/2014/main" id="{03D130F7-F35E-4B63-A217-C0A5C4E7CDE5}"/>
                 </a:ext>
               </a:extLst>
             </p:cNvPr>
@@ -3356,131 +3361,51 @@
             <p:nvPr/>
           </p:nvPicPr>
           <p:blipFill>
-            <a:blip r:embed="rId2">
-              <a:extLst>
-                <a:ext uri="{28A0092B-C50C-407E-A947-70E740481C1C}">
-                  <a14:useLocalDpi xmlns:a14="http://schemas.microsoft.com/office/drawing/2010/main" val="0"/>
-                </a:ext>
-              </a:extLst>
-            </a:blip>
+            <a:blip r:embed="rId2"/>
             <a:stretch>
               <a:fillRect/>
             </a:stretch>
           </p:blipFill>
           <p:spPr>
             <a:xfrm>
-              <a:off x="362666" y="648047"/>
-              <a:ext cx="11466667" cy="5561905"/>
+              <a:off x="2460416" y="-150965"/>
+              <a:ext cx="7028571" cy="4304762"/>
             </a:xfrm>
             <a:prstGeom prst="rect">
               <a:avLst/>
             </a:prstGeom>
           </p:spPr>
         </p:pic>
-        <p:sp>
-          <p:nvSpPr>
-            <p:cNvPr id="6" name="矩形 5">
+        <p:pic>
+          <p:nvPicPr>
+            <p:cNvPr id="3" name="图片 2">
               <a:extLst>
                 <a:ext uri="{FF2B5EF4-FFF2-40B4-BE49-F238E27FC236}">
-                  <a16:creationId xmlns:a16="http://schemas.microsoft.com/office/drawing/2014/main" id="{DFBE2C3B-DB63-4797-AD55-2DDF763CFB9D}"/>
+                  <a16:creationId xmlns:a16="http://schemas.microsoft.com/office/drawing/2014/main" id="{99843D4C-1A4E-424A-B98F-4DC68B244C72}"/>
                 </a:ext>
               </a:extLst>
             </p:cNvPr>
-            <p:cNvSpPr/>
+            <p:cNvPicPr>
+              <a:picLocks noChangeAspect="1"/>
+            </p:cNvPicPr>
             <p:nvPr/>
-          </p:nvSpPr>
+          </p:nvPicPr>
+          <p:blipFill>
+            <a:blip r:embed="rId3"/>
+            <a:stretch>
+              <a:fillRect/>
+            </a:stretch>
+          </p:blipFill>
           <p:spPr>
             <a:xfrm>
-              <a:off x="289249" y="-1150374"/>
-              <a:ext cx="11560629" cy="1766194"/>
+              <a:off x="2429333" y="4153797"/>
+              <a:ext cx="7333333" cy="4028571"/>
             </a:xfrm>
             <a:prstGeom prst="rect">
               <a:avLst/>
             </a:prstGeom>
-            <a:solidFill>
-              <a:schemeClr val="bg1"/>
-            </a:solidFill>
-            <a:ln>
-              <a:noFill/>
-            </a:ln>
           </p:spPr>
-          <p:style>
-            <a:lnRef idx="2">
-              <a:schemeClr val="accent1">
-                <a:shade val="50000"/>
-              </a:schemeClr>
-            </a:lnRef>
-            <a:fillRef idx="1">
-              <a:schemeClr val="accent1"/>
-            </a:fillRef>
-            <a:effectRef idx="0">
-              <a:schemeClr val="accent1"/>
-            </a:effectRef>
-            <a:fontRef idx="minor">
-              <a:schemeClr val="lt1"/>
-            </a:fontRef>
-          </p:style>
-          <p:txBody>
-            <a:bodyPr rtlCol="0" anchor="ctr"/>
-            <a:lstStyle/>
-            <a:p>
-              <a:pPr algn="ctr"/>
-              <a:endParaRPr lang="zh-CN" altLang="en-US"/>
-            </a:p>
-          </p:txBody>
-        </p:sp>
-        <p:sp>
-          <p:nvSpPr>
-            <p:cNvPr id="7" name="矩形 6">
-              <a:extLst>
-                <a:ext uri="{FF2B5EF4-FFF2-40B4-BE49-F238E27FC236}">
-                  <a16:creationId xmlns:a16="http://schemas.microsoft.com/office/drawing/2014/main" id="{CD703CC7-8384-49CC-874F-C3909026F013}"/>
-                </a:ext>
-              </a:extLst>
-            </p:cNvPr>
-            <p:cNvSpPr/>
-            <p:nvPr/>
-          </p:nvSpPr>
-          <p:spPr>
-            <a:xfrm>
-              <a:off x="268704" y="6242179"/>
-              <a:ext cx="11560629" cy="1766194"/>
-            </a:xfrm>
-            <a:prstGeom prst="rect">
-              <a:avLst/>
-            </a:prstGeom>
-            <a:solidFill>
-              <a:schemeClr val="bg1"/>
-            </a:solidFill>
-            <a:ln>
-              <a:noFill/>
-            </a:ln>
-          </p:spPr>
-          <p:style>
-            <a:lnRef idx="2">
-              <a:schemeClr val="accent1">
-                <a:shade val="50000"/>
-              </a:schemeClr>
-            </a:lnRef>
-            <a:fillRef idx="1">
-              <a:schemeClr val="accent1"/>
-            </a:fillRef>
-            <a:effectRef idx="0">
-              <a:schemeClr val="accent1"/>
-            </a:effectRef>
-            <a:fontRef idx="minor">
-              <a:schemeClr val="lt1"/>
-            </a:fontRef>
-          </p:style>
-          <p:txBody>
-            <a:bodyPr rtlCol="0" anchor="ctr"/>
-            <a:lstStyle/>
-            <a:p>
-              <a:pPr algn="ctr"/>
-              <a:endParaRPr lang="zh-CN" altLang="en-US"/>
-            </a:p>
-          </p:txBody>
-        </p:sp>
+        </p:pic>
       </p:grpSp>
     </p:spTree>
     <p:extLst>

--- a/images/新建 Microsoft PowerPoint 演示文稿.pptx
+++ b/images/新建 Microsoft PowerPoint 演示文稿.pptx
@@ -3326,87 +3326,66 @@
           <a:chExt cx="0" cy="0"/>
         </a:xfrm>
       </p:grpSpPr>
-      <p:grpSp>
-        <p:nvGrpSpPr>
-          <p:cNvPr id="4" name="组合 3">
-            <a:extLst>
-              <a:ext uri="{FF2B5EF4-FFF2-40B4-BE49-F238E27FC236}">
-                <a16:creationId xmlns:a16="http://schemas.microsoft.com/office/drawing/2014/main" id="{5FB7FAB9-4517-467E-9C72-9256172AB6D6}"/>
-              </a:ext>
-            </a:extLst>
-          </p:cNvPr>
-          <p:cNvGrpSpPr/>
+      <p:pic>
+        <p:nvPicPr>
+          <p:cNvPr id="2" name="图片 1">
+            <a:extLst>
+              <a:ext uri="{FF2B5EF4-FFF2-40B4-BE49-F238E27FC236}">
+                <a16:creationId xmlns:a16="http://schemas.microsoft.com/office/drawing/2014/main" id="{03D130F7-F35E-4B63-A217-C0A5C4E7CDE5}"/>
+              </a:ext>
+            </a:extLst>
+          </p:cNvPr>
+          <p:cNvPicPr>
+            <a:picLocks noChangeAspect="1"/>
+          </p:cNvPicPr>
           <p:nvPr/>
-        </p:nvGrpSpPr>
-        <p:grpSpPr>
+        </p:nvPicPr>
+        <p:blipFill>
+          <a:blip r:embed="rId2"/>
+          <a:stretch>
+            <a:fillRect/>
+          </a:stretch>
+        </p:blipFill>
+        <p:spPr>
           <a:xfrm>
-            <a:off x="2429333" y="-150965"/>
-            <a:ext cx="7333333" cy="8333333"/>
-            <a:chOff x="2429333" y="-150965"/>
-            <a:chExt cx="7333333" cy="8333333"/>
+            <a:off x="2460416" y="-150965"/>
+            <a:ext cx="7028571" cy="4304762"/>
           </a:xfrm>
-        </p:grpSpPr>
-        <p:pic>
-          <p:nvPicPr>
-            <p:cNvPr id="2" name="图片 1">
-              <a:extLst>
-                <a:ext uri="{FF2B5EF4-FFF2-40B4-BE49-F238E27FC236}">
-                  <a16:creationId xmlns:a16="http://schemas.microsoft.com/office/drawing/2014/main" id="{03D130F7-F35E-4B63-A217-C0A5C4E7CDE5}"/>
-                </a:ext>
-              </a:extLst>
-            </p:cNvPr>
-            <p:cNvPicPr>
-              <a:picLocks noChangeAspect="1"/>
-            </p:cNvPicPr>
-            <p:nvPr/>
-          </p:nvPicPr>
-          <p:blipFill>
-            <a:blip r:embed="rId2"/>
-            <a:stretch>
-              <a:fillRect/>
-            </a:stretch>
-          </p:blipFill>
-          <p:spPr>
-            <a:xfrm>
-              <a:off x="2460416" y="-150965"/>
-              <a:ext cx="7028571" cy="4304762"/>
-            </a:xfrm>
-            <a:prstGeom prst="rect">
-              <a:avLst/>
-            </a:prstGeom>
-          </p:spPr>
-        </p:pic>
-        <p:pic>
-          <p:nvPicPr>
-            <p:cNvPr id="3" name="图片 2">
-              <a:extLst>
-                <a:ext uri="{FF2B5EF4-FFF2-40B4-BE49-F238E27FC236}">
-                  <a16:creationId xmlns:a16="http://schemas.microsoft.com/office/drawing/2014/main" id="{99843D4C-1A4E-424A-B98F-4DC68B244C72}"/>
-                </a:ext>
-              </a:extLst>
-            </p:cNvPr>
-            <p:cNvPicPr>
-              <a:picLocks noChangeAspect="1"/>
-            </p:cNvPicPr>
-            <p:nvPr/>
-          </p:nvPicPr>
-          <p:blipFill>
-            <a:blip r:embed="rId3"/>
-            <a:stretch>
-              <a:fillRect/>
-            </a:stretch>
-          </p:blipFill>
-          <p:spPr>
-            <a:xfrm>
-              <a:off x="2429333" y="4153797"/>
-              <a:ext cx="7333333" cy="4028571"/>
-            </a:xfrm>
-            <a:prstGeom prst="rect">
-              <a:avLst/>
-            </a:prstGeom>
-          </p:spPr>
-        </p:pic>
-      </p:grpSp>
+          <a:prstGeom prst="rect">
+            <a:avLst/>
+          </a:prstGeom>
+        </p:spPr>
+      </p:pic>
+      <p:pic>
+        <p:nvPicPr>
+          <p:cNvPr id="3" name="图片 2">
+            <a:extLst>
+              <a:ext uri="{FF2B5EF4-FFF2-40B4-BE49-F238E27FC236}">
+                <a16:creationId xmlns:a16="http://schemas.microsoft.com/office/drawing/2014/main" id="{99843D4C-1A4E-424A-B98F-4DC68B244C72}"/>
+              </a:ext>
+            </a:extLst>
+          </p:cNvPr>
+          <p:cNvPicPr>
+            <a:picLocks noChangeAspect="1"/>
+          </p:cNvPicPr>
+          <p:nvPr/>
+        </p:nvPicPr>
+        <p:blipFill>
+          <a:blip r:embed="rId3"/>
+          <a:stretch>
+            <a:fillRect/>
+          </a:stretch>
+        </p:blipFill>
+        <p:spPr>
+          <a:xfrm>
+            <a:off x="2429333" y="4153797"/>
+            <a:ext cx="7333333" cy="4028571"/>
+          </a:xfrm>
+          <a:prstGeom prst="rect">
+            <a:avLst/>
+          </a:prstGeom>
+        </p:spPr>
+      </p:pic>
     </p:spTree>
     <p:extLst>
       <p:ext uri="{BB962C8B-B14F-4D97-AF65-F5344CB8AC3E}">

--- a/images/新建 Microsoft PowerPoint 演示文稿.pptx
+++ b/images/新建 Microsoft PowerPoint 演示文稿.pptx
@@ -3326,66 +3326,107 @@
           <a:chExt cx="0" cy="0"/>
         </a:xfrm>
       </p:grpSpPr>
-      <p:pic>
-        <p:nvPicPr>
-          <p:cNvPr id="2" name="图片 1">
-            <a:extLst>
-              <a:ext uri="{FF2B5EF4-FFF2-40B4-BE49-F238E27FC236}">
-                <a16:creationId xmlns:a16="http://schemas.microsoft.com/office/drawing/2014/main" id="{03D130F7-F35E-4B63-A217-C0A5C4E7CDE5}"/>
-              </a:ext>
-            </a:extLst>
-          </p:cNvPr>
-          <p:cNvPicPr>
-            <a:picLocks noChangeAspect="1"/>
-          </p:cNvPicPr>
+      <p:grpSp>
+        <p:nvGrpSpPr>
+          <p:cNvPr id="5" name="组合 4">
+            <a:extLst>
+              <a:ext uri="{FF2B5EF4-FFF2-40B4-BE49-F238E27FC236}">
+                <a16:creationId xmlns:a16="http://schemas.microsoft.com/office/drawing/2014/main" id="{218BD628-9DFA-4F73-908A-09741975CAE0}"/>
+              </a:ext>
+            </a:extLst>
+          </p:cNvPr>
+          <p:cNvGrpSpPr/>
           <p:nvPr/>
-        </p:nvPicPr>
-        <p:blipFill>
-          <a:blip r:embed="rId2"/>
-          <a:stretch>
-            <a:fillRect/>
-          </a:stretch>
-        </p:blipFill>
-        <p:spPr>
+        </p:nvGrpSpPr>
+        <p:grpSpPr>
           <a:xfrm>
-            <a:off x="2460416" y="-150965"/>
-            <a:ext cx="7028571" cy="4304762"/>
+            <a:off x="1962803" y="307910"/>
+            <a:ext cx="7741034" cy="6550090"/>
+            <a:chOff x="1962803" y="307910"/>
+            <a:chExt cx="7741034" cy="6550090"/>
           </a:xfrm>
-          <a:prstGeom prst="rect">
-            <a:avLst/>
-          </a:prstGeom>
-        </p:spPr>
-      </p:pic>
-      <p:pic>
-        <p:nvPicPr>
-          <p:cNvPr id="3" name="图片 2">
-            <a:extLst>
-              <a:ext uri="{FF2B5EF4-FFF2-40B4-BE49-F238E27FC236}">
-                <a16:creationId xmlns:a16="http://schemas.microsoft.com/office/drawing/2014/main" id="{99843D4C-1A4E-424A-B98F-4DC68B244C72}"/>
-              </a:ext>
-            </a:extLst>
-          </p:cNvPr>
-          <p:cNvPicPr>
-            <a:picLocks noChangeAspect="1"/>
-          </p:cNvPicPr>
-          <p:nvPr/>
-        </p:nvPicPr>
-        <p:blipFill>
-          <a:blip r:embed="rId3"/>
-          <a:stretch>
-            <a:fillRect/>
-          </a:stretch>
-        </p:blipFill>
-        <p:spPr>
-          <a:xfrm>
-            <a:off x="2429333" y="4153797"/>
-            <a:ext cx="7333333" cy="4028571"/>
-          </a:xfrm>
-          <a:prstGeom prst="rect">
-            <a:avLst/>
-          </a:prstGeom>
-        </p:spPr>
-      </p:pic>
+        </p:grpSpPr>
+        <p:pic>
+          <p:nvPicPr>
+            <p:cNvPr id="3" name="图片 2">
+              <a:extLst>
+                <a:ext uri="{FF2B5EF4-FFF2-40B4-BE49-F238E27FC236}">
+                  <a16:creationId xmlns:a16="http://schemas.microsoft.com/office/drawing/2014/main" id="{99843D4C-1A4E-424A-B98F-4DC68B244C72}"/>
+                </a:ext>
+              </a:extLst>
+            </p:cNvPr>
+            <p:cNvPicPr>
+              <a:picLocks noChangeAspect="1"/>
+            </p:cNvPicPr>
+            <p:nvPr/>
+          </p:nvPicPr>
+          <p:blipFill>
+            <a:blip r:embed="rId2"/>
+            <a:stretch>
+              <a:fillRect/>
+            </a:stretch>
+          </p:blipFill>
+          <p:spPr>
+            <a:xfrm>
+              <a:off x="2112099" y="1414714"/>
+              <a:ext cx="7333333" cy="4028571"/>
+            </a:xfrm>
+            <a:prstGeom prst="rect">
+              <a:avLst/>
+            </a:prstGeom>
+          </p:spPr>
+        </p:pic>
+        <p:sp>
+          <p:nvSpPr>
+            <p:cNvPr id="4" name="矩形 3">
+              <a:extLst>
+                <a:ext uri="{FF2B5EF4-FFF2-40B4-BE49-F238E27FC236}">
+                  <a16:creationId xmlns:a16="http://schemas.microsoft.com/office/drawing/2014/main" id="{463502DC-686A-47BA-AAE1-5737D961C1BF}"/>
+                </a:ext>
+              </a:extLst>
+            </p:cNvPr>
+            <p:cNvSpPr/>
+            <p:nvPr/>
+          </p:nvSpPr>
+          <p:spPr>
+            <a:xfrm>
+              <a:off x="1962803" y="307910"/>
+              <a:ext cx="7741034" cy="6550090"/>
+            </a:xfrm>
+            <a:prstGeom prst="rect">
+              <a:avLst/>
+            </a:prstGeom>
+            <a:noFill/>
+            <a:ln>
+              <a:noFill/>
+            </a:ln>
+          </p:spPr>
+          <p:style>
+            <a:lnRef idx="2">
+              <a:schemeClr val="accent1">
+                <a:shade val="50000"/>
+              </a:schemeClr>
+            </a:lnRef>
+            <a:fillRef idx="1">
+              <a:schemeClr val="accent1"/>
+            </a:fillRef>
+            <a:effectRef idx="0">
+              <a:schemeClr val="accent1"/>
+            </a:effectRef>
+            <a:fontRef idx="minor">
+              <a:schemeClr val="lt1"/>
+            </a:fontRef>
+          </p:style>
+          <p:txBody>
+            <a:bodyPr rtlCol="0" anchor="ctr"/>
+            <a:lstStyle/>
+            <a:p>
+              <a:pPr algn="ctr"/>
+              <a:endParaRPr lang="zh-CN" altLang="en-US"/>
+            </a:p>
+          </p:txBody>
+        </p:sp>
+      </p:grpSp>
     </p:spTree>
     <p:extLst>
       <p:ext uri="{BB962C8B-B14F-4D97-AF65-F5344CB8AC3E}">
